--- a/templates/business-template.pptx
+++ b/templates/business-template.pptx
@@ -848,7 +848,7 @@
       </p:sp>
       <p:sp>
         <p:nvSpPr>
-          <p:cNvPr id="2" name="Title 1">
+          <p:cNvPr id="2" name="title">
             <a:extLst>
               <a:ext uri="{FF2B5EF4-FFF2-40B4-BE49-F238E27FC236}">
                 <a16:creationId xmlns:a16="http://schemas.microsoft.com/office/drawing/2014/main" id="{8D0879D7-BC87-1B95-28E3-6866C1EF37A2}"/>
@@ -882,7 +882,7 @@
       </p:sp>
       <p:sp>
         <p:nvSpPr>
-          <p:cNvPr id="4" name="Subtitle 3">
+          <p:cNvPr id="4" name="subtitle">
             <a:extLst>
               <a:ext uri="{FF2B5EF4-FFF2-40B4-BE49-F238E27FC236}">
                 <a16:creationId xmlns:a16="http://schemas.microsoft.com/office/drawing/2014/main" id="{6577B5BA-127A-1BA2-56B8-2CF507BCBCB4}"/>
@@ -988,7 +988,7 @@
       </p:grpSpPr>
       <p:sp>
         <p:nvSpPr>
-          <p:cNvPr id="2" name="Title 1">
+          <p:cNvPr id="2" name="title">
             <a:extLst>
               <a:ext uri="{FF2B5EF4-FFF2-40B4-BE49-F238E27FC236}">
                 <a16:creationId xmlns:a16="http://schemas.microsoft.com/office/drawing/2014/main" id="{C65B7AB7-63CB-030B-C7BE-96F5343532B8}"/>
@@ -1096,7 +1096,7 @@
       </p:grpSpPr>
       <p:sp>
         <p:nvSpPr>
-          <p:cNvPr id="2" name="Title 1"/>
+          <p:cNvPr id="2" name="title"/>
           <p:cNvSpPr>
             <a:spLocks noGrp="1"/>
           </p:cNvSpPr>
@@ -1139,7 +1139,7 @@
       </p:sp>
       <p:sp>
         <p:nvSpPr>
-          <p:cNvPr id="3" name="Subtitle 2"/>
+          <p:cNvPr id="3" name="subtitle"/>
           <p:cNvSpPr>
             <a:spLocks noGrp="1"/>
           </p:cNvSpPr>
@@ -1267,7 +1267,7 @@
       </p:sp>
       <p:sp>
         <p:nvSpPr>
-          <p:cNvPr id="8" name="Text Placeholder 7">
+          <p:cNvPr id="8" name="body">
             <a:extLst>
               <a:ext uri="{FF2B5EF4-FFF2-40B4-BE49-F238E27FC236}">
                 <a16:creationId xmlns:a16="http://schemas.microsoft.com/office/drawing/2014/main" id="{F8CA8190-8E87-D3F0-4629-1A640FABCDD9}"/>
@@ -1475,7 +1475,7 @@
       </p:grpSpPr>
       <p:sp>
         <p:nvSpPr>
-          <p:cNvPr id="2" name="Title 1">
+          <p:cNvPr id="2" name="title">
             <a:extLst>
               <a:ext uri="{FF2B5EF4-FFF2-40B4-BE49-F238E27FC236}">
                 <a16:creationId xmlns:a16="http://schemas.microsoft.com/office/drawing/2014/main" id="{DF07B045-209C-FF0C-BF56-1D192D80EE1C}"/>
@@ -1509,7 +1509,7 @@
       </p:sp>
       <p:sp>
         <p:nvSpPr>
-          <p:cNvPr id="20" name="Subtitle 19"/>
+          <p:cNvPr id="20" name="subtitle"/>
           <p:cNvSpPr>
             <a:spLocks noGrp="1"/>
           </p:cNvSpPr>
@@ -1665,7 +1665,7 @@
       </p:grpSpPr>
       <p:sp>
         <p:nvSpPr>
-          <p:cNvPr id="2" name="Title 1"/>
+          <p:cNvPr id="2" name="title"/>
           <p:cNvSpPr>
             <a:spLocks noGrp="1"/>
           </p:cNvSpPr>
@@ -1699,7 +1699,7 @@
       </p:sp>
       <p:sp>
         <p:nvSpPr>
-          <p:cNvPr id="3" name="Content Placeholder 2"/>
+          <p:cNvPr id="3" name="body"/>
           <p:cNvSpPr>
             <a:spLocks noGrp="1"/>
           </p:cNvSpPr>
@@ -1746,7 +1746,7 @@
       </p:sp>
       <p:sp>
         <p:nvSpPr>
-          <p:cNvPr id="4" name="Content Placeholder 3"/>
+          <p:cNvPr id="4" name="body_2"/>
           <p:cNvSpPr>
             <a:spLocks noGrp="1"/>
           </p:cNvSpPr>
@@ -1843,7 +1843,7 @@
       </p:grpSpPr>
       <p:sp>
         <p:nvSpPr>
-          <p:cNvPr id="2" name="Title 1"/>
+          <p:cNvPr id="2" name="title"/>
           <p:cNvSpPr>
             <a:spLocks noGrp="1"/>
           </p:cNvSpPr>
